--- a/cross-border-story-v2.pptx
+++ b/cross-border-story-v2.pptx
@@ -5397,7 +5397,7 @@
                   <a:srgbClr val="6E675E"/>
                 </a:solidFill>
               </a:rPr>
-              <a:t>▶ 想亲手试试？点击进入在线 Demo：</a:t>
+              <a:t>▶ 点击进入在线 Demo：</a:t>
             </a:r>
             <a:r>
               <a:rPr sz="1200" b="1">

--- a/cross-border-story-v2.pptx
+++ b/cross-border-story-v2.pptx
@@ -5406,7 +5406,7 @@
                 </a:solidFill>
                 <a:hlinkClick r:id="rId2"/>
               </a:rPr>
-              <a:t>https://cross-border-analysis-w42yqftvzzhsyleappvj6py.streamlit.app</a:t>
+              <a:t>https://cross-border-analysis.streamlit.app</a:t>
             </a:r>
           </a:p>
         </p:txBody>

--- a/cross-border-story-v2.pptx
+++ b/cross-border-story-v2.pptx
@@ -3876,7 +3876,7 @@
                 </a:solidFill>
                 <a:latin typeface="微软雅黑"/>
               </a:rPr>
-              <a:t>▪ 这就是我上一份工作困惑的“上市公司版”：利润被货和应收占住了</a:t>
+              <a:t>▪ 这是跨境行业“账面赚钱、手里没现金”的典型：利润被货和应收占住了</a:t>
             </a:r>
             <a:endParaRPr sz="1500" b="1">
               <a:solidFill>
@@ -5671,7 +5671,7 @@
                 </a:solidFill>
                 <a:latin typeface="微软雅黑"/>
               </a:rPr>
-              <a:t>大部分 SKU 单独核算均为盈利，但公司在亚马逊平台的整体表现</a:t>
+              <a:t>跨境电商怎么赚钱、怎么走得长远，受哪些因素影响？平台佣金、广告、库存与现金流，如何改变一家公司的盈利结构？</a:t>
             </a:r>
             <a:r>
               <a:rPr lang="zh-CN" sz="1550" b="0">
@@ -5680,7 +5680,7 @@
                 </a:solidFill>
                 <a:latin typeface="微软雅黑"/>
               </a:rPr>
-              <a:t>较前几年下降</a:t>
+              <a:t/>
             </a:r>
             <a:r>
               <a:rPr sz="1550" b="0">
@@ -5689,7 +5689,7 @@
                 </a:solidFill>
                 <a:latin typeface="微软雅黑"/>
               </a:rPr>
-              <a:t>。为什么“单品盈利”没有带来“整体赚钱”？</a:t>
+              <a:t/>
             </a:r>
             <a:endParaRPr sz="1550" b="0">
               <a:solidFill>
@@ -5751,7 +5751,7 @@
                 </a:solidFill>
                 <a:latin typeface="微软雅黑"/>
               </a:rPr>
-              <a:t>以 5 家上市公司为样本，用公开财报和海关数据，从行业、公司、现金流三个层面验证：哪些因素真正解释了“单品盈利却没带来整体赚钱”。</a:t>
+              <a:t>以 5 家上市公司为样本，用公开财报和海关数据，从行业、公司、现金流三个层面验证：哪些因素真正决定了跨境电商公司能不能赚钱、能不能走得长远。</a:t>
             </a:r>
             <a:endParaRPr sz="1550" b="0">
               <a:solidFill>
@@ -5956,7 +5956,7 @@
                 </a:solidFill>
                 <a:latin typeface="微软雅黑"/>
               </a:rPr>
-              <a:t>我把困惑拆成四个可量化的问题</a:t>
+              <a:t>我把“怎么赚钱、怎么走得长远”拆成四个可量化的问题</a:t>
             </a:r>
             <a:endParaRPr sz="2700" b="1">
               <a:solidFill>
@@ -6556,7 +6556,7 @@
                 </a:solidFill>
                 <a:latin typeface="微软雅黑"/>
               </a:rPr>
-              <a:t>为什么“单品盈利”没带来“整体赚钱”？现金流是不是生死线？怎么起步才能活得久？</a:t>
+              <a:t>为什么利润和现金流经常对不上？现金流是不是生死线，如何判断该转型？</a:t>
             </a:r>
             <a:endParaRPr sz="1250" b="0">
               <a:solidFill>
